--- a/slide/SlideChuyenNganh.pptx
+++ b/slide/SlideChuyenNganh.pptx
@@ -329,7 +329,7 @@
             <a:fld id="{1D8BD707-D9CF-40AE-B4C6-C98DA3205C09}" type="datetimeFigureOut">
               <a:rPr lang="en-US" smtClean="0"/>
               <a:pPr/>
-              <a:t>12/29/2025</a:t>
+              <a:t>1/10/2026</a:t>
             </a:fld>
             <a:endParaRPr lang="en-US"/>
           </a:p>
@@ -494,7 +494,7 @@
             <a:fld id="{1D8BD707-D9CF-40AE-B4C6-C98DA3205C09}" type="datetimeFigureOut">
               <a:rPr lang="en-US" smtClean="0"/>
               <a:pPr/>
-              <a:t>12/29/2025</a:t>
+              <a:t>1/10/2026</a:t>
             </a:fld>
             <a:endParaRPr lang="en-US"/>
           </a:p>
@@ -669,7 +669,7 @@
             <a:fld id="{1D8BD707-D9CF-40AE-B4C6-C98DA3205C09}" type="datetimeFigureOut">
               <a:rPr lang="en-US" smtClean="0"/>
               <a:pPr/>
-              <a:t>12/29/2025</a:t>
+              <a:t>1/10/2026</a:t>
             </a:fld>
             <a:endParaRPr lang="en-US"/>
           </a:p>
@@ -834,7 +834,7 @@
             <a:fld id="{1D8BD707-D9CF-40AE-B4C6-C98DA3205C09}" type="datetimeFigureOut">
               <a:rPr lang="en-US" smtClean="0"/>
               <a:pPr/>
-              <a:t>12/29/2025</a:t>
+              <a:t>1/10/2026</a:t>
             </a:fld>
             <a:endParaRPr lang="en-US"/>
           </a:p>
@@ -1076,7 +1076,7 @@
             <a:fld id="{1D8BD707-D9CF-40AE-B4C6-C98DA3205C09}" type="datetimeFigureOut">
               <a:rPr lang="en-US" smtClean="0"/>
               <a:pPr/>
-              <a:t>12/29/2025</a:t>
+              <a:t>1/10/2026</a:t>
             </a:fld>
             <a:endParaRPr lang="en-US"/>
           </a:p>
@@ -1358,7 +1358,7 @@
             <a:fld id="{1D8BD707-D9CF-40AE-B4C6-C98DA3205C09}" type="datetimeFigureOut">
               <a:rPr lang="en-US" smtClean="0"/>
               <a:pPr/>
-              <a:t>12/29/2025</a:t>
+              <a:t>1/10/2026</a:t>
             </a:fld>
             <a:endParaRPr lang="en-US"/>
           </a:p>
@@ -1774,7 +1774,7 @@
             <a:fld id="{1D8BD707-D9CF-40AE-B4C6-C98DA3205C09}" type="datetimeFigureOut">
               <a:rPr lang="en-US" smtClean="0"/>
               <a:pPr/>
-              <a:t>12/29/2025</a:t>
+              <a:t>1/10/2026</a:t>
             </a:fld>
             <a:endParaRPr lang="en-US"/>
           </a:p>
@@ -1888,7 +1888,7 @@
             <a:fld id="{1D8BD707-D9CF-40AE-B4C6-C98DA3205C09}" type="datetimeFigureOut">
               <a:rPr lang="en-US" smtClean="0"/>
               <a:pPr/>
-              <a:t>12/29/2025</a:t>
+              <a:t>1/10/2026</a:t>
             </a:fld>
             <a:endParaRPr lang="en-US"/>
           </a:p>
@@ -1980,7 +1980,7 @@
             <a:fld id="{1D8BD707-D9CF-40AE-B4C6-C98DA3205C09}" type="datetimeFigureOut">
               <a:rPr lang="en-US" smtClean="0"/>
               <a:pPr/>
-              <a:t>12/29/2025</a:t>
+              <a:t>1/10/2026</a:t>
             </a:fld>
             <a:endParaRPr lang="en-US"/>
           </a:p>
@@ -2252,7 +2252,7 @@
             <a:fld id="{1D8BD707-D9CF-40AE-B4C6-C98DA3205C09}" type="datetimeFigureOut">
               <a:rPr lang="en-US" smtClean="0"/>
               <a:pPr/>
-              <a:t>12/29/2025</a:t>
+              <a:t>1/10/2026</a:t>
             </a:fld>
             <a:endParaRPr lang="en-US"/>
           </a:p>
@@ -2501,7 +2501,7 @@
             <a:fld id="{1D8BD707-D9CF-40AE-B4C6-C98DA3205C09}" type="datetimeFigureOut">
               <a:rPr lang="en-US" smtClean="0"/>
               <a:pPr/>
-              <a:t>12/29/2025</a:t>
+              <a:t>1/10/2026</a:t>
             </a:fld>
             <a:endParaRPr lang="en-US"/>
           </a:p>
@@ -2709,7 +2709,7 @@
             <a:fld id="{1D8BD707-D9CF-40AE-B4C6-C98DA3205C09}" type="datetimeFigureOut">
               <a:rPr lang="en-US" smtClean="0"/>
               <a:pPr/>
-              <a:t>12/29/2025</a:t>
+              <a:t>1/10/2026</a:t>
             </a:fld>
             <a:endParaRPr lang="en-US"/>
           </a:p>
@@ -3080,6 +3080,52 @@
           <a:chExt cx="0" cy="0"/>
         </a:xfrm>
       </p:grpSpPr>
+      <p:sp>
+        <p:nvSpPr>
+          <p:cNvPr id="2" name="Rectangle 1">
+            <a:extLst>
+              <a:ext uri="{FF2B5EF4-FFF2-40B4-BE49-F238E27FC236}">
+                <a16:creationId xmlns:a16="http://schemas.microsoft.com/office/drawing/2014/main" id="{7D61B7F5-BDFC-4FFA-9751-0FF3111A5EEB}"/>
+              </a:ext>
+            </a:extLst>
+          </p:cNvPr>
+          <p:cNvSpPr/>
+          <p:nvPr/>
+        </p:nvSpPr>
+        <p:spPr>
+          <a:xfrm>
+            <a:off x="0" y="6929336"/>
+            <a:ext cx="18288000" cy="3390900"/>
+          </a:xfrm>
+          <a:prstGeom prst="rect">
+            <a:avLst/>
+          </a:prstGeom>
+        </p:spPr>
+        <p:style>
+          <a:lnRef idx="2">
+            <a:schemeClr val="accent1">
+              <a:shade val="50000"/>
+            </a:schemeClr>
+          </a:lnRef>
+          <a:fillRef idx="1">
+            <a:schemeClr val="accent1"/>
+          </a:fillRef>
+          <a:effectRef idx="0">
+            <a:schemeClr val="accent1"/>
+          </a:effectRef>
+          <a:fontRef idx="minor">
+            <a:schemeClr val="lt1"/>
+          </a:fontRef>
+        </p:style>
+        <p:txBody>
+          <a:bodyPr rtlCol="0" anchor="ctr"/>
+          <a:lstStyle/>
+          <a:p>
+            <a:pPr algn="ctr"/>
+            <a:endParaRPr lang="en-US"/>
+          </a:p>
+        </p:txBody>
+      </p:sp>
       <p:grpSp>
         <p:nvGrpSpPr>
           <p:cNvPr id="5" name="Group 5"/>
@@ -3351,65 +3397,13 @@
       </p:sp>
       <p:sp>
         <p:nvSpPr>
-          <p:cNvPr id="11" name="Freeform 11"/>
-          <p:cNvSpPr/>
-          <p:nvPr/>
-        </p:nvSpPr>
-        <p:spPr>
-          <a:xfrm>
-            <a:off x="1868154" y="1028700"/>
-            <a:ext cx="1422950" cy="1420363"/>
-          </a:xfrm>
-          <a:custGeom>
-            <a:avLst/>
-            <a:gdLst/>
-            <a:ahLst/>
-            <a:cxnLst/>
-            <a:rect l="l" t="t" r="r" b="b"/>
-            <a:pathLst>
-              <a:path w="1897267" h="1893817">
-                <a:moveTo>
-                  <a:pt x="0" y="0"/>
-                </a:moveTo>
-                <a:lnTo>
-                  <a:pt x="1897267" y="0"/>
-                </a:lnTo>
-                <a:lnTo>
-                  <a:pt x="1897267" y="1893817"/>
-                </a:lnTo>
-                <a:lnTo>
-                  <a:pt x="0" y="1893817"/>
-                </a:lnTo>
-                <a:lnTo>
-                  <a:pt x="0" y="0"/>
-                </a:lnTo>
-                <a:close/>
-              </a:path>
-            </a:pathLst>
-          </a:custGeom>
-          <a:blipFill>
-            <a:blip r:embed="rId4">
-              <a:extLst>
-                <a:ext uri="{96DAC541-7B7A-43D3-8B79-37D633B846F1}">
-                  <asvg:svgBlip xmlns:asvg="http://schemas.microsoft.com/office/drawing/2016/SVG/main" r:embed="rId5"/>
-                </a:ext>
-              </a:extLst>
-            </a:blip>
-            <a:stretch>
-              <a:fillRect/>
-            </a:stretch>
-          </a:blipFill>
-        </p:spPr>
-      </p:sp>
-      <p:sp>
-        <p:nvSpPr>
           <p:cNvPr id="13" name="TextBox 13"/>
           <p:cNvSpPr txBox="1"/>
           <p:nvPr/>
         </p:nvSpPr>
         <p:spPr>
           <a:xfrm>
-            <a:off x="1573580" y="2544036"/>
+            <a:off x="457200" y="716163"/>
             <a:ext cx="14657020" cy="4085349"/>
           </a:xfrm>
           <a:prstGeom prst="rect">
@@ -5989,65 +5983,13 @@
       </p:grpSpPr>
       <p:sp>
         <p:nvSpPr>
-          <p:cNvPr id="2" name="Freeform 2"/>
-          <p:cNvSpPr/>
-          <p:nvPr/>
-        </p:nvSpPr>
-        <p:spPr>
-          <a:xfrm>
-            <a:off x="-8365801" y="5467351"/>
-            <a:ext cx="11841808" cy="11820277"/>
-          </a:xfrm>
-          <a:custGeom>
-            <a:avLst/>
-            <a:gdLst/>
-            <a:ahLst/>
-            <a:cxnLst/>
-            <a:rect l="l" t="t" r="r" b="b"/>
-            <a:pathLst>
-              <a:path w="11841808" h="11820277">
-                <a:moveTo>
-                  <a:pt x="0" y="0"/>
-                </a:moveTo>
-                <a:lnTo>
-                  <a:pt x="11841807" y="0"/>
-                </a:lnTo>
-                <a:lnTo>
-                  <a:pt x="11841807" y="11820277"/>
-                </a:lnTo>
-                <a:lnTo>
-                  <a:pt x="0" y="11820277"/>
-                </a:lnTo>
-                <a:lnTo>
-                  <a:pt x="0" y="0"/>
-                </a:lnTo>
-                <a:close/>
-              </a:path>
-            </a:pathLst>
-          </a:custGeom>
-          <a:blipFill>
-            <a:blip r:embed="rId2">
-              <a:extLst>
-                <a:ext uri="{96DAC541-7B7A-43D3-8B79-37D633B846F1}">
-                  <asvg:svgBlip xmlns:asvg="http://schemas.microsoft.com/office/drawing/2016/SVG/main" r:embed="rId3"/>
-                </a:ext>
-              </a:extLst>
-            </a:blip>
-            <a:stretch>
-              <a:fillRect/>
-            </a:stretch>
-          </a:blipFill>
-        </p:spPr>
-      </p:sp>
-      <p:sp>
-        <p:nvSpPr>
           <p:cNvPr id="3" name="Freeform 3"/>
           <p:cNvSpPr/>
           <p:nvPr/>
         </p:nvSpPr>
         <p:spPr>
           <a:xfrm>
-            <a:off x="13487400" y="-6676777"/>
+            <a:off x="13631779" y="-6676777"/>
             <a:ext cx="11841808" cy="11820277"/>
           </a:xfrm>
           <a:custGeom>
@@ -6160,8 +6102,8 @@
         </p:blipFill>
         <p:spPr>
           <a:xfrm>
-            <a:off x="0" y="2190679"/>
-            <a:ext cx="12763500" cy="2571750"/>
+            <a:off x="1082" y="5791200"/>
+            <a:ext cx="18370045" cy="4495800"/>
           </a:xfrm>
           <a:prstGeom prst="rect">
             <a:avLst/>
